--- a/pdf_to_ppt_output/sample_digital_document.pptx
+++ b/pdf_to_ppt_output/sample_digital_document.pptx
@@ -3118,8 +3118,8 @@
         </p:nvSpPr>
         <p:spPr>
           <a:xfrm>
-            <a:off x="457200" y="1280160"/>
-            <a:ext cx="11277295" cy="822959"/>
+            <a:off x="457200" y="1554798"/>
+            <a:ext cx="11277295" cy="1043940"/>
           </a:xfrm>
           <a:prstGeom prst="rect">
             <a:avLst/>
@@ -3173,7 +3173,7 @@
         </p:blipFill>
         <p:spPr>
           <a:xfrm>
-            <a:off x="457200" y="2240279"/>
+            <a:off x="457200" y="2735898"/>
             <a:ext cx="4114800" cy="2651759"/>
           </a:xfrm>
           <a:prstGeom prst="rect">
@@ -3189,8 +3189,8 @@
         </p:nvSpPr>
         <p:spPr>
           <a:xfrm>
-            <a:off x="457200" y="5074919"/>
-            <a:ext cx="11277295" cy="365760"/>
+            <a:off x="457200" y="5570537"/>
+            <a:ext cx="11277295" cy="313690"/>
           </a:xfrm>
           <a:prstGeom prst="rect">
             <a:avLst/>
@@ -3259,8 +3259,8 @@
         </p:nvSpPr>
         <p:spPr>
           <a:xfrm>
-            <a:off x="457200" y="1280160"/>
-            <a:ext cx="11277295" cy="365760"/>
+            <a:off x="457200" y="1554798"/>
+            <a:ext cx="11277295" cy="535940"/>
           </a:xfrm>
           <a:prstGeom prst="rect">
             <a:avLst/>
@@ -3291,7 +3291,7 @@
           <p:nvPr/>
         </p:nvGraphicFramePr>
         <p:xfrm>
-          <a:off x="457200" y="1783079"/>
+          <a:off x="457200" y="2227897"/>
           <a:ext cx="11277295" cy="1600200"/>
         </p:xfrm>
         <a:graphic>
@@ -3628,8 +3628,8 @@
         </p:nvSpPr>
         <p:spPr>
           <a:xfrm>
-            <a:off x="457200" y="3566160"/>
-            <a:ext cx="11277295" cy="365760"/>
+            <a:off x="457200" y="4010978"/>
+            <a:ext cx="11277295" cy="535940"/>
           </a:xfrm>
           <a:prstGeom prst="rect">
             <a:avLst/>
